--- a/Reporte 290726.pptx
+++ b/Reporte 290726.pptx
@@ -6420,7 +6420,31 @@
                 <a:latin typeface="Montserrat Black"/>
                 <a:sym typeface="Arial"/>
               </a:rPr>
-              <a:t>Elaborado: 28 de julio</a:t>
+              <a:t>Elaborado: 2</a:t>
+            </a:r>
+            <a:r>
+              <a:rPr lang="es-MX" sz="1600" dirty="0">
+                <a:solidFill>
+                  <a:srgbClr val="D8AB72"/>
+                </a:solidFill>
+              </a:rPr>
+              <a:t>9</a:t>
+            </a:r>
+            <a:r>
+              <a:rPr kumimoji="0" lang="es-MX" sz="1600" b="0" i="0" u="none" strike="noStrike" kern="0" cap="none" spc="0" normalizeH="0" baseline="0" noProof="0" dirty="0">
+                <a:ln>
+                  <a:noFill/>
+                </a:ln>
+                <a:solidFill>
+                  <a:srgbClr val="D8AB72"/>
+                </a:solidFill>
+                <a:effectLst/>
+                <a:uLnTx/>
+                <a:uFillTx/>
+                <a:latin typeface="Montserrat Black"/>
+                <a:sym typeface="Arial"/>
+              </a:rPr>
+              <a:t> de julio</a:t>
             </a:r>
             <a:endParaRPr lang="es-MX" sz="1600" dirty="0">
               <a:solidFill>
@@ -6543,10 +6567,10 @@
       </p:sp>
       <p:pic>
         <p:nvPicPr>
-          <p:cNvPr id="5" name="Imagen 4">
+          <p:cNvPr id="4" name="Imagen 3">
             <a:extLst>
               <a:ext uri="{FF2B5EF4-FFF2-40B4-BE49-F238E27FC236}">
-                <a16:creationId xmlns:a16="http://schemas.microsoft.com/office/drawing/2014/main" id="{4BA09524-1B12-2E58-231D-653A7069DE12}"/>
+                <a16:creationId xmlns:a16="http://schemas.microsoft.com/office/drawing/2014/main" id="{35293FF1-2FFF-8798-C789-5E839825A58D}"/>
               </a:ext>
             </a:extLst>
           </p:cNvPr>
@@ -6563,8 +6587,8 @@
         </p:blipFill>
         <p:spPr>
           <a:xfrm>
-            <a:off x="0" y="891725"/>
-            <a:ext cx="9144000" cy="3502925"/>
+            <a:off x="0" y="867433"/>
+            <a:ext cx="9144000" cy="3551510"/>
           </a:xfrm>
           <a:prstGeom prst="rect">
             <a:avLst/>
@@ -6641,10 +6665,10 @@
       </p:sp>
       <p:pic>
         <p:nvPicPr>
-          <p:cNvPr id="3" name="Imagen 2">
+          <p:cNvPr id="4" name="Imagen 3">
             <a:extLst>
               <a:ext uri="{FF2B5EF4-FFF2-40B4-BE49-F238E27FC236}">
-                <a16:creationId xmlns:a16="http://schemas.microsoft.com/office/drawing/2014/main" id="{F6BC4083-69E7-A2C6-0B36-D956A57A05D5}"/>
+                <a16:creationId xmlns:a16="http://schemas.microsoft.com/office/drawing/2014/main" id="{886DFB94-FA4D-193A-1F90-529DA8D26BBC}"/>
               </a:ext>
             </a:extLst>
           </p:cNvPr>
@@ -6661,8 +6685,8 @@
         </p:blipFill>
         <p:spPr>
           <a:xfrm>
-            <a:off x="0" y="1249418"/>
-            <a:ext cx="9144000" cy="2644664"/>
+            <a:off x="0" y="1332920"/>
+            <a:ext cx="9144000" cy="2620536"/>
           </a:xfrm>
           <a:prstGeom prst="rect">
             <a:avLst/>
@@ -6745,10 +6769,10 @@
       </p:sp>
       <p:pic>
         <p:nvPicPr>
-          <p:cNvPr id="3" name="Imagen 2">
+          <p:cNvPr id="4" name="Imagen 3">
             <a:extLst>
               <a:ext uri="{FF2B5EF4-FFF2-40B4-BE49-F238E27FC236}">
-                <a16:creationId xmlns:a16="http://schemas.microsoft.com/office/drawing/2014/main" id="{EA9E5763-202A-E129-7739-8350AB4D6004}"/>
+                <a16:creationId xmlns:a16="http://schemas.microsoft.com/office/drawing/2014/main" id="{42D2D865-1EED-8565-3DBB-CF7B683C7727}"/>
               </a:ext>
             </a:extLst>
           </p:cNvPr>
@@ -6765,8 +6789,8 @@
         </p:blipFill>
         <p:spPr>
           <a:xfrm>
-            <a:off x="0" y="765749"/>
-            <a:ext cx="9144000" cy="3754877"/>
+            <a:off x="0" y="994876"/>
+            <a:ext cx="9144000" cy="3296623"/>
           </a:xfrm>
           <a:prstGeom prst="rect">
             <a:avLst/>
@@ -6843,10 +6867,10 @@
       </p:sp>
       <p:pic>
         <p:nvPicPr>
-          <p:cNvPr id="5" name="Imagen 4">
+          <p:cNvPr id="4" name="Imagen 3">
             <a:extLst>
               <a:ext uri="{FF2B5EF4-FFF2-40B4-BE49-F238E27FC236}">
-                <a16:creationId xmlns:a16="http://schemas.microsoft.com/office/drawing/2014/main" id="{397A2464-0738-6893-A810-DEBA536256A0}"/>
+                <a16:creationId xmlns:a16="http://schemas.microsoft.com/office/drawing/2014/main" id="{1F4E2C19-F920-DF0F-2EAA-88902583549B}"/>
               </a:ext>
             </a:extLst>
           </p:cNvPr>
@@ -6863,8 +6887,8 @@
         </p:blipFill>
         <p:spPr>
           <a:xfrm>
-            <a:off x="0" y="1230392"/>
-            <a:ext cx="9144000" cy="2825592"/>
+            <a:off x="0" y="1236224"/>
+            <a:ext cx="9144000" cy="2813927"/>
           </a:xfrm>
           <a:prstGeom prst="rect">
             <a:avLst/>
@@ -6941,10 +6965,10 @@
       </p:sp>
       <p:pic>
         <p:nvPicPr>
-          <p:cNvPr id="3" name="Imagen 2">
+          <p:cNvPr id="4" name="Imagen 3">
             <a:extLst>
               <a:ext uri="{FF2B5EF4-FFF2-40B4-BE49-F238E27FC236}">
-                <a16:creationId xmlns:a16="http://schemas.microsoft.com/office/drawing/2014/main" id="{BCDC3493-778B-B897-9A3C-FAC5F754C7C6}"/>
+                <a16:creationId xmlns:a16="http://schemas.microsoft.com/office/drawing/2014/main" id="{3073C8A1-A45B-02AA-38CD-97DFEF18E3AE}"/>
               </a:ext>
             </a:extLst>
           </p:cNvPr>
@@ -6961,8 +6985,8 @@
         </p:blipFill>
         <p:spPr>
           <a:xfrm>
-            <a:off x="0" y="665647"/>
-            <a:ext cx="9144000" cy="3898605"/>
+            <a:off x="0" y="602749"/>
+            <a:ext cx="9144000" cy="4080877"/>
           </a:xfrm>
           <a:prstGeom prst="rect">
             <a:avLst/>
@@ -7045,10 +7069,10 @@
       </p:sp>
       <p:pic>
         <p:nvPicPr>
-          <p:cNvPr id="4" name="Imagen 3">
+          <p:cNvPr id="3" name="Imagen 2">
             <a:extLst>
               <a:ext uri="{FF2B5EF4-FFF2-40B4-BE49-F238E27FC236}">
-                <a16:creationId xmlns:a16="http://schemas.microsoft.com/office/drawing/2014/main" id="{9911C546-EB38-95BD-8F37-8DFF956B89C4}"/>
+                <a16:creationId xmlns:a16="http://schemas.microsoft.com/office/drawing/2014/main" id="{20003664-B100-E05C-9B00-038629070D7C}"/>
               </a:ext>
             </a:extLst>
           </p:cNvPr>
@@ -7065,8 +7089,8 @@
         </p:blipFill>
         <p:spPr>
           <a:xfrm>
-            <a:off x="1787142" y="499764"/>
-            <a:ext cx="5496692" cy="4286848"/>
+            <a:off x="0" y="1161612"/>
+            <a:ext cx="9144000" cy="2820276"/>
           </a:xfrm>
           <a:prstGeom prst="rect">
             <a:avLst/>
@@ -7219,10 +7243,10 @@
       </p:sp>
       <p:pic>
         <p:nvPicPr>
-          <p:cNvPr id="4" name="Imagen 3">
+          <p:cNvPr id="3" name="Imagen 2">
             <a:extLst>
               <a:ext uri="{FF2B5EF4-FFF2-40B4-BE49-F238E27FC236}">
-                <a16:creationId xmlns:a16="http://schemas.microsoft.com/office/drawing/2014/main" id="{8DF346C9-768F-E53B-3AA4-6A8596AF9C01}"/>
+                <a16:creationId xmlns:a16="http://schemas.microsoft.com/office/drawing/2014/main" id="{B5E68318-EC7F-8211-76F3-61C828ABB39B}"/>
               </a:ext>
             </a:extLst>
           </p:cNvPr>
@@ -7239,8 +7263,8 @@
         </p:blipFill>
         <p:spPr>
           <a:xfrm>
-            <a:off x="0" y="946287"/>
-            <a:ext cx="9144000" cy="3393802"/>
+            <a:off x="0" y="870827"/>
+            <a:ext cx="9144000" cy="3401845"/>
           </a:xfrm>
           <a:prstGeom prst="rect">
             <a:avLst/>
@@ -7333,10 +7357,10 @@
       </p:sp>
       <p:pic>
         <p:nvPicPr>
-          <p:cNvPr id="3" name="Imagen 2">
+          <p:cNvPr id="4" name="Imagen 3">
             <a:extLst>
               <a:ext uri="{FF2B5EF4-FFF2-40B4-BE49-F238E27FC236}">
-                <a16:creationId xmlns:a16="http://schemas.microsoft.com/office/drawing/2014/main" id="{142EA2B6-A5CF-C6BD-DFBA-540EC4E6F114}"/>
+                <a16:creationId xmlns:a16="http://schemas.microsoft.com/office/drawing/2014/main" id="{5AC7E60B-0D17-863E-2002-74FA821ACB3F}"/>
               </a:ext>
             </a:extLst>
           </p:cNvPr>
@@ -7353,8 +7377,8 @@
         </p:blipFill>
         <p:spPr>
           <a:xfrm>
-            <a:off x="0" y="1406907"/>
-            <a:ext cx="9144000" cy="2472562"/>
+            <a:off x="0" y="1400796"/>
+            <a:ext cx="9144000" cy="2484783"/>
           </a:xfrm>
           <a:prstGeom prst="rect">
             <a:avLst/>
@@ -7447,10 +7471,10 @@
       </p:sp>
       <p:pic>
         <p:nvPicPr>
-          <p:cNvPr id="2" name="Imagen 1">
+          <p:cNvPr id="3" name="Imagen 2">
             <a:extLst>
               <a:ext uri="{FF2B5EF4-FFF2-40B4-BE49-F238E27FC236}">
-                <a16:creationId xmlns:a16="http://schemas.microsoft.com/office/drawing/2014/main" id="{A08E1D12-2874-23B8-209D-386BC4232234}"/>
+                <a16:creationId xmlns:a16="http://schemas.microsoft.com/office/drawing/2014/main" id="{A80C8C79-5FE5-19BE-97EB-150F318495CB}"/>
               </a:ext>
             </a:extLst>
           </p:cNvPr>
@@ -7467,8 +7491,8 @@
         </p:blipFill>
         <p:spPr>
           <a:xfrm>
-            <a:off x="422370" y="570139"/>
-            <a:ext cx="8226235" cy="4146098"/>
+            <a:off x="771806" y="746258"/>
+            <a:ext cx="7527363" cy="3793860"/>
           </a:xfrm>
           <a:prstGeom prst="rect">
             <a:avLst/>
@@ -7557,10 +7581,10 @@
       </p:sp>
       <p:pic>
         <p:nvPicPr>
-          <p:cNvPr id="4" name="Imagen 3">
+          <p:cNvPr id="3" name="Imagen 2">
             <a:extLst>
               <a:ext uri="{FF2B5EF4-FFF2-40B4-BE49-F238E27FC236}">
-                <a16:creationId xmlns:a16="http://schemas.microsoft.com/office/drawing/2014/main" id="{78E5C624-56C5-4761-54D0-B5857944ABA1}"/>
+                <a16:creationId xmlns:a16="http://schemas.microsoft.com/office/drawing/2014/main" id="{7393D27C-2A67-DE14-E408-0307A51C38AB}"/>
               </a:ext>
             </a:extLst>
           </p:cNvPr>
@@ -7577,8 +7601,8 @@
         </p:blipFill>
         <p:spPr>
           <a:xfrm>
-            <a:off x="575705" y="642668"/>
-            <a:ext cx="7992590" cy="3858163"/>
+            <a:off x="1534693" y="537869"/>
+            <a:ext cx="6001588" cy="4210638"/>
           </a:xfrm>
           <a:prstGeom prst="rect">
             <a:avLst/>
@@ -7671,10 +7695,10 @@
       </p:sp>
       <p:pic>
         <p:nvPicPr>
-          <p:cNvPr id="4" name="Imagen 3">
+          <p:cNvPr id="3" name="Imagen 2">
             <a:extLst>
               <a:ext uri="{FF2B5EF4-FFF2-40B4-BE49-F238E27FC236}">
-                <a16:creationId xmlns:a16="http://schemas.microsoft.com/office/drawing/2014/main" id="{ACF62CAB-EC89-48B6-7CE3-9787A285B28D}"/>
+                <a16:creationId xmlns:a16="http://schemas.microsoft.com/office/drawing/2014/main" id="{37E91D9F-8C99-588E-3EAA-31103758D766}"/>
               </a:ext>
             </a:extLst>
           </p:cNvPr>
@@ -7691,8 +7715,8 @@
         </p:blipFill>
         <p:spPr>
           <a:xfrm>
-            <a:off x="0" y="884082"/>
-            <a:ext cx="9144000" cy="3375335"/>
+            <a:off x="0" y="936406"/>
+            <a:ext cx="9144000" cy="3413563"/>
           </a:xfrm>
           <a:prstGeom prst="rect">
             <a:avLst/>
@@ -7785,10 +7809,10 @@
       </p:sp>
       <p:pic>
         <p:nvPicPr>
-          <p:cNvPr id="2" name="Imagen 1">
+          <p:cNvPr id="3" name="Imagen 2">
             <a:extLst>
               <a:ext uri="{FF2B5EF4-FFF2-40B4-BE49-F238E27FC236}">
-                <a16:creationId xmlns:a16="http://schemas.microsoft.com/office/drawing/2014/main" id="{DCE74190-07F4-7CEF-C274-777023B71ED4}"/>
+                <a16:creationId xmlns:a16="http://schemas.microsoft.com/office/drawing/2014/main" id="{8D7EDB1C-D352-6FC8-5CF9-5D84E67481AE}"/>
               </a:ext>
             </a:extLst>
           </p:cNvPr>
@@ -7805,8 +7829,8 @@
         </p:blipFill>
         <p:spPr>
           <a:xfrm>
-            <a:off x="607524" y="663458"/>
-            <a:ext cx="7855928" cy="3959460"/>
+            <a:off x="493240" y="605858"/>
+            <a:ext cx="8084496" cy="4074660"/>
           </a:xfrm>
           <a:prstGeom prst="rect">
             <a:avLst/>
@@ -7899,10 +7923,10 @@
       </p:sp>
       <p:pic>
         <p:nvPicPr>
-          <p:cNvPr id="2" name="Imagen 1">
+          <p:cNvPr id="3" name="Imagen 2">
             <a:extLst>
               <a:ext uri="{FF2B5EF4-FFF2-40B4-BE49-F238E27FC236}">
-                <a16:creationId xmlns:a16="http://schemas.microsoft.com/office/drawing/2014/main" id="{7C16BC82-8CB8-5F57-1D57-DD39A834A4C8}"/>
+                <a16:creationId xmlns:a16="http://schemas.microsoft.com/office/drawing/2014/main" id="{895C147C-083E-BEBA-0735-A045BB3B89B9}"/>
               </a:ext>
             </a:extLst>
           </p:cNvPr>
@@ -7919,8 +7943,8 @@
         </p:blipFill>
         <p:spPr>
           <a:xfrm>
-            <a:off x="1106488" y="914940"/>
-            <a:ext cx="6858000" cy="3456495"/>
+            <a:off x="580309" y="631339"/>
+            <a:ext cx="7983382" cy="4023698"/>
           </a:xfrm>
           <a:prstGeom prst="rect">
             <a:avLst/>
@@ -8009,10 +8033,10 @@
       </p:sp>
       <p:pic>
         <p:nvPicPr>
-          <p:cNvPr id="4" name="Imagen 3">
+          <p:cNvPr id="3" name="Imagen 2">
             <a:extLst>
               <a:ext uri="{FF2B5EF4-FFF2-40B4-BE49-F238E27FC236}">
-                <a16:creationId xmlns:a16="http://schemas.microsoft.com/office/drawing/2014/main" id="{24BA6BB2-8DFC-604F-D9C6-B16F8187931F}"/>
+                <a16:creationId xmlns:a16="http://schemas.microsoft.com/office/drawing/2014/main" id="{C25DC0FD-6ACB-6728-1F8B-D37AD1964F84}"/>
               </a:ext>
             </a:extLst>
           </p:cNvPr>
@@ -8029,8 +8053,8 @@
         </p:blipFill>
         <p:spPr>
           <a:xfrm>
-            <a:off x="548718" y="642659"/>
-            <a:ext cx="7973538" cy="4001058"/>
+            <a:off x="558244" y="947501"/>
+            <a:ext cx="7954485" cy="3391373"/>
           </a:xfrm>
           <a:prstGeom prst="rect">
             <a:avLst/>
